--- a/public/fun/cards/beauty/beauty-18.pptx
+++ b/public/fun/cards/beauty/beauty-18.pptx
@@ -3085,7 +3085,7 @@
     <p:bg>
       <p:bgPr>
         <a:solidFill>
-          <a:srgbClr val="A25A1B"/>
+          <a:srgbClr val="F3F4F6"/>
         </a:solidFill>
         <a:effectLst/>
       </p:bgPr>
@@ -3099,43 +3099,14 @@
       <p:grpSpPr/>
       <p:sp>
         <p:nvSpPr>
-          <p:cNvPr id="2" name="Rectangle 1"/>
-          <p:cNvSpPr/>
+          <p:cNvPr id="2" name="텍스트"/>
+          <p:cNvSpPr txBox="1"/>
           <p:nvPr/>
         </p:nvSpPr>
         <p:spPr>
           <a:xfrm>
-            <a:off x="1944000" y="216000"/>
-            <a:ext cx="10800" cy="1368000"/>
-          </a:xfrm>
-          <a:prstGeom prst="rect">
-            <a:avLst/>
-          </a:prstGeom>
-          <a:solidFill>
-            <a:srgbClr val="F8DFC9"/>
-          </a:solidFill>
-          <a:ln>
-            <a:noFill/>
-          </a:ln>
-        </p:spPr>
-        <p:txBody>
-          <a:bodyPr rtlCol="0" anchor="ctr"/>
-          <a:lstStyle/>
-          <a:p>
-            <a:pPr algn="ctr"/>
-          </a:p>
-        </p:txBody>
-      </p:sp>
-      <p:sp>
-        <p:nvSpPr>
-          <p:cNvPr id="3" name="텍스트"/>
-          <p:cNvSpPr txBox="1"/>
-          <p:nvPr/>
-        </p:nvSpPr>
-        <p:spPr>
-          <a:xfrm>
-            <a:off x="216000" y="201600"/>
-            <a:ext cx="1584000" cy="100800"/>
+            <a:off x="252000" y="223200"/>
+            <a:ext cx="2016000" cy="133351"/>
           </a:xfrm>
           <a:prstGeom prst="rect">
             <a:avLst/>
@@ -3154,9 +3125,9 @@
               </a:lnSpc>
             </a:pPr>
             <a:r>
-              <a:rPr sz="700" b="1" spc="300">
+              <a:rPr sz="700" b="1" spc="200">
                 <a:solidFill>
-                  <a:srgbClr val="F5EEE7"/>
+                  <a:srgbClr val="6B7280"/>
                 </a:solidFill>
                 <a:latin typeface="맑은 고딕"/>
                 <a:ea typeface="맑은 고딕"/>
@@ -3168,105 +3139,14 @@
       </p:sp>
       <p:sp>
         <p:nvSpPr>
-          <p:cNvPr id="4" name="Oval 3"/>
-          <p:cNvSpPr/>
+          <p:cNvPr id="3" name="텍스트"/>
+          <p:cNvSpPr txBox="1"/>
           <p:nvPr/>
         </p:nvSpPr>
         <p:spPr>
           <a:xfrm>
-            <a:off x="329472" y="440208"/>
-            <a:ext cx="133056" cy="152064"/>
-          </a:xfrm>
-          <a:prstGeom prst="ellipse">
-            <a:avLst/>
-          </a:prstGeom>
-          <a:noFill/>
-          <a:ln w="19008">
-            <a:solidFill>
-              <a:srgbClr val="F8DFC9"/>
-            </a:solidFill>
-          </a:ln>
-        </p:spPr>
-        <p:txBody>
-          <a:bodyPr rtlCol="0" anchor="ctr"/>
-          <a:lstStyle/>
-          <a:p>
-            <a:pPr algn="ctr"/>
-          </a:p>
-        </p:txBody>
-      </p:sp>
-      <p:sp>
-        <p:nvSpPr>
-          <p:cNvPr id="5" name="Oval 4"/>
-          <p:cNvSpPr/>
-          <p:nvPr/>
-        </p:nvSpPr>
-        <p:spPr>
-          <a:xfrm>
-            <a:off x="350856" y="461592"/>
-            <a:ext cx="90288" cy="109296"/>
-          </a:xfrm>
-          <a:prstGeom prst="ellipse">
-            <a:avLst/>
-          </a:prstGeom>
-          <a:solidFill>
-            <a:srgbClr val="B1743F">
-              <a:alpha val="35000"/>
-            </a:srgbClr>
-          </a:solidFill>
-          <a:ln>
-            <a:noFill/>
-          </a:ln>
-        </p:spPr>
-        <p:txBody>
-          <a:bodyPr rtlCol="0" anchor="ctr"/>
-          <a:lstStyle/>
-          <a:p>
-            <a:pPr algn="ctr"/>
-          </a:p>
-        </p:txBody>
-      </p:sp>
-      <p:sp>
-        <p:nvSpPr>
-          <p:cNvPr id="6" name="Rounded Rectangle 5"/>
-          <p:cNvSpPr/>
-          <p:nvPr/>
-        </p:nvSpPr>
-        <p:spPr>
-          <a:xfrm>
-            <a:off x="384120" y="587520"/>
-            <a:ext cx="23760" cy="71280"/>
-          </a:xfrm>
-          <a:prstGeom prst="roundRect">
-            <a:avLst>
-              <a:gd name="adj" fmla="val 50000"/>
-            </a:avLst>
-          </a:prstGeom>
-          <a:solidFill>
-            <a:srgbClr val="F8DFC9"/>
-          </a:solidFill>
-          <a:ln>
-            <a:noFill/>
-          </a:ln>
-        </p:spPr>
-        <p:txBody>
-          <a:bodyPr rtlCol="0" anchor="ctr"/>
-          <a:lstStyle/>
-          <a:p>
-            <a:pPr algn="ctr"/>
-          </a:p>
-        </p:txBody>
-      </p:sp>
-      <p:sp>
-        <p:nvSpPr>
-          <p:cNvPr id="7" name="텍스트"/>
-          <p:cNvSpPr txBox="1"/>
-          <p:nvPr/>
-        </p:nvSpPr>
-        <p:spPr>
-          <a:xfrm>
-            <a:off x="216000" y="972000"/>
-            <a:ext cx="1728000" cy="122400"/>
+            <a:off x="252000" y="468000"/>
+            <a:ext cx="2520000" cy="360000"/>
           </a:xfrm>
           <a:prstGeom prst="rect">
             <a:avLst/>
@@ -3281,32 +3161,32 @@
           <a:p>
             <a:pPr algn="l">
               <a:lnSpc>
-                <a:spcPts val="1232"/>
+                <a:spcPts val="3190"/>
               </a:lnSpc>
             </a:pPr>
             <a:r>
-              <a:rPr sz="850" b="1">
+              <a:rPr sz="2200" b="1">
                 <a:solidFill>
-                  <a:srgbClr val="FBECDF"/>
+                  <a:srgbClr val="12151C"/>
                 </a:solidFill>
                 <a:latin typeface="맑은 고딕"/>
                 <a:ea typeface="맑은 고딕"/>
               </a:rPr>
-              <a:t>에스테틱 원장</a:t>
-            </a:r>
-          </a:p>
-        </p:txBody>
-      </p:sp>
-      <p:sp>
-        <p:nvSpPr>
-          <p:cNvPr id="8" name="텍스트"/>
+              <a:t>송현우</a:t>
+            </a:r>
+          </a:p>
+        </p:txBody>
+      </p:sp>
+      <p:sp>
+        <p:nvSpPr>
+          <p:cNvPr id="4" name="텍스트"/>
           <p:cNvSpPr txBox="1"/>
           <p:nvPr/>
         </p:nvSpPr>
         <p:spPr>
           <a:xfrm>
-            <a:off x="216000" y="1123200"/>
-            <a:ext cx="1728000" cy="346712"/>
+            <a:off x="252000" y="871200"/>
+            <a:ext cx="2520000" cy="171451"/>
           </a:xfrm>
           <a:prstGeom prst="rect">
             <a:avLst/>
@@ -3321,32 +3201,32 @@
           <a:p>
             <a:pPr algn="l">
               <a:lnSpc>
-                <a:spcPts val="3045"/>
+                <a:spcPts val="1305"/>
               </a:lnSpc>
             </a:pPr>
             <a:r>
-              <a:rPr sz="2100" b="1" spc="50">
+              <a:rPr sz="900" b="0">
                 <a:solidFill>
-                  <a:srgbClr val="FFFFFF"/>
+                  <a:srgbClr val="6B7280"/>
                 </a:solidFill>
-                <a:latin typeface="바탕"/>
-                <a:ea typeface="바탕"/>
+                <a:latin typeface="맑은 고딕"/>
+                <a:ea typeface="맑은 고딕"/>
               </a:rPr>
-              <a:t>송현우</a:t>
-            </a:r>
-          </a:p>
-        </p:txBody>
-      </p:sp>
-      <p:sp>
-        <p:nvSpPr>
-          <p:cNvPr id="9" name="텍스트"/>
+              <a:t>에스테틱 원장</a:t>
+            </a:r>
+          </a:p>
+        </p:txBody>
+      </p:sp>
+      <p:sp>
+        <p:nvSpPr>
+          <p:cNvPr id="5" name="텍스트"/>
           <p:cNvSpPr txBox="1"/>
           <p:nvPr/>
         </p:nvSpPr>
         <p:spPr>
           <a:xfrm>
-            <a:off x="2073600" y="540000"/>
-            <a:ext cx="122400" cy="168911"/>
+            <a:off x="252000" y="1216800"/>
+            <a:ext cx="2520000" cy="129541"/>
           </a:xfrm>
           <a:prstGeom prst="rect">
             <a:avLst/>
@@ -3361,32 +3241,61 @@
           <a:p>
             <a:pPr algn="l">
               <a:lnSpc>
-                <a:spcPts val="1015"/>
+                <a:spcPts val="986"/>
               </a:lnSpc>
             </a:pPr>
             <a:r>
-              <a:rPr sz="700" b="1">
+              <a:rPr sz="680" b="0">
                 <a:solidFill>
-                  <a:srgbClr val="FBECDF"/>
+                  <a:srgbClr val="6B7280"/>
                 </a:solidFill>
                 <a:latin typeface="맑은 고딕"/>
                 <a:ea typeface="맑은 고딕"/>
               </a:rPr>
-              <a:t>T</a:t>
-            </a:r>
-          </a:p>
-        </p:txBody>
-      </p:sp>
-      <p:sp>
-        <p:nvSpPr>
-          <p:cNvPr id="10" name="텍스트"/>
+              <a:t>주소를 입력해 주세요</a:t>
+            </a:r>
+          </a:p>
+        </p:txBody>
+      </p:sp>
+      <p:sp>
+        <p:nvSpPr>
+          <p:cNvPr id="6" name="Rectangle 5"/>
+          <p:cNvSpPr/>
+          <p:nvPr/>
+        </p:nvSpPr>
+        <p:spPr>
+          <a:xfrm>
+            <a:off x="0" y="1476000"/>
+            <a:ext cx="3240000" cy="324000"/>
+          </a:xfrm>
+          <a:prstGeom prst="rect">
+            <a:avLst/>
+          </a:prstGeom>
+          <a:solidFill>
+            <a:srgbClr val="4A3AFF"/>
+          </a:solidFill>
+          <a:ln>
+            <a:noFill/>
+          </a:ln>
+        </p:spPr>
+        <p:txBody>
+          <a:bodyPr rtlCol="0" anchor="ctr"/>
+          <a:lstStyle/>
+          <a:p>
+            <a:pPr algn="ctr"/>
+          </a:p>
+        </p:txBody>
+      </p:sp>
+      <p:sp>
+        <p:nvSpPr>
+          <p:cNvPr id="7" name="텍스트"/>
           <p:cNvSpPr txBox="1"/>
           <p:nvPr/>
         </p:nvSpPr>
         <p:spPr>
           <a:xfrm>
-            <a:off x="2217600" y="540000"/>
-            <a:ext cx="900000" cy="168911"/>
+            <a:off x="252000" y="1569600"/>
+            <a:ext cx="1296000" cy="133351"/>
           </a:xfrm>
           <a:prstGeom prst="rect">
             <a:avLst/>
@@ -3405,7 +3314,7 @@
               </a:lnSpc>
             </a:pPr>
             <a:r>
-              <a:rPr sz="700" b="0">
+              <a:rPr sz="700" b="1">
                 <a:solidFill>
                   <a:srgbClr val="FFFFFF"/>
                 </a:solidFill>
@@ -3419,14 +3328,14 @@
       </p:sp>
       <p:sp>
         <p:nvSpPr>
-          <p:cNvPr id="11" name="텍스트"/>
+          <p:cNvPr id="8" name="텍스트"/>
           <p:cNvSpPr txBox="1"/>
           <p:nvPr/>
         </p:nvSpPr>
         <p:spPr>
           <a:xfrm>
-            <a:off x="2073600" y="708911"/>
-            <a:ext cx="122400" cy="168911"/>
+            <a:off x="1656000" y="1569600"/>
+            <a:ext cx="1368000" cy="133351"/>
           </a:xfrm>
           <a:prstGeom prst="rect">
             <a:avLst/>
@@ -3446,46 +3355,6 @@
             </a:pPr>
             <a:r>
               <a:rPr sz="700" b="1">
-                <a:solidFill>
-                  <a:srgbClr val="FBECDF"/>
-                </a:solidFill>
-                <a:latin typeface="맑은 고딕"/>
-                <a:ea typeface="맑은 고딕"/>
-              </a:rPr>
-              <a:t>E</a:t>
-            </a:r>
-          </a:p>
-        </p:txBody>
-      </p:sp>
-      <p:sp>
-        <p:nvSpPr>
-          <p:cNvPr id="12" name="텍스트"/>
-          <p:cNvSpPr txBox="1"/>
-          <p:nvPr/>
-        </p:nvSpPr>
-        <p:spPr>
-          <a:xfrm>
-            <a:off x="2217600" y="708911"/>
-            <a:ext cx="900000" cy="168911"/>
-          </a:xfrm>
-          <a:prstGeom prst="rect">
-            <a:avLst/>
-          </a:prstGeom>
-          <a:noFill/>
-        </p:spPr>
-        <p:txBody>
-          <a:bodyPr wrap="square" lIns="0" rIns="0" tIns="0" bIns="0" anchor="t">
-            <a:spAutoFit/>
-          </a:bodyPr>
-          <a:lstStyle/>
-          <a:p>
-            <a:pPr algn="l">
-              <a:lnSpc>
-                <a:spcPts val="1015"/>
-              </a:lnSpc>
-            </a:pPr>
-            <a:r>
-              <a:rPr sz="700" b="0">
                 <a:solidFill>
                   <a:srgbClr val="FFFFFF"/>
                 </a:solidFill>
@@ -3493,86 +3362,6 @@
                 <a:ea typeface="맑은 고딕"/>
               </a:rPr>
               <a:t>name@example.com</a:t>
-            </a:r>
-          </a:p>
-        </p:txBody>
-      </p:sp>
-      <p:sp>
-        <p:nvSpPr>
-          <p:cNvPr id="13" name="텍스트"/>
-          <p:cNvSpPr txBox="1"/>
-          <p:nvPr/>
-        </p:nvSpPr>
-        <p:spPr>
-          <a:xfrm>
-            <a:off x="2073600" y="877822"/>
-            <a:ext cx="122400" cy="168911"/>
-          </a:xfrm>
-          <a:prstGeom prst="rect">
-            <a:avLst/>
-          </a:prstGeom>
-          <a:noFill/>
-        </p:spPr>
-        <p:txBody>
-          <a:bodyPr wrap="square" lIns="0" rIns="0" tIns="0" bIns="0" anchor="t">
-            <a:spAutoFit/>
-          </a:bodyPr>
-          <a:lstStyle/>
-          <a:p>
-            <a:pPr algn="l">
-              <a:lnSpc>
-                <a:spcPts val="1015"/>
-              </a:lnSpc>
-            </a:pPr>
-            <a:r>
-              <a:rPr sz="700" b="1">
-                <a:solidFill>
-                  <a:srgbClr val="FBECDF"/>
-                </a:solidFill>
-                <a:latin typeface="맑은 고딕"/>
-                <a:ea typeface="맑은 고딕"/>
-              </a:rPr>
-              <a:t>A</a:t>
-            </a:r>
-          </a:p>
-        </p:txBody>
-      </p:sp>
-      <p:sp>
-        <p:nvSpPr>
-          <p:cNvPr id="14" name="텍스트"/>
-          <p:cNvSpPr txBox="1"/>
-          <p:nvPr/>
-        </p:nvSpPr>
-        <p:spPr>
-          <a:xfrm>
-            <a:off x="2217600" y="877822"/>
-            <a:ext cx="900000" cy="168911"/>
-          </a:xfrm>
-          <a:prstGeom prst="rect">
-            <a:avLst/>
-          </a:prstGeom>
-          <a:noFill/>
-        </p:spPr>
-        <p:txBody>
-          <a:bodyPr wrap="square" lIns="0" rIns="0" tIns="0" bIns="0" anchor="t">
-            <a:spAutoFit/>
-          </a:bodyPr>
-          <a:lstStyle/>
-          <a:p>
-            <a:pPr algn="l">
-              <a:lnSpc>
-                <a:spcPts val="1015"/>
-              </a:lnSpc>
-            </a:pPr>
-            <a:r>
-              <a:rPr sz="700" b="0">
-                <a:solidFill>
-                  <a:srgbClr val="FFFFFF"/>
-                </a:solidFill>
-                <a:latin typeface="맑은 고딕"/>
-                <a:ea typeface="맑은 고딕"/>
-              </a:rPr>
-              <a:t>주소를 입력해 주세요</a:t>
             </a:r>
           </a:p>
         </p:txBody>
@@ -3591,7 +3380,7 @@
     <p:bg>
       <p:bgPr>
         <a:solidFill>
-          <a:srgbClr val="723F13"/>
+          <a:srgbClr val="0E1116"/>
         </a:solidFill>
         <a:effectLst/>
       </p:bgPr>
@@ -3611,14 +3400,14 @@
         </p:nvSpPr>
         <p:spPr>
           <a:xfrm>
-            <a:off x="0" y="0"/>
-            <a:ext cx="273600" cy="1800000"/>
+            <a:off x="2088000" y="0"/>
+            <a:ext cx="1152000" cy="1800000"/>
           </a:xfrm>
           <a:prstGeom prst="rect">
             <a:avLst/>
           </a:prstGeom>
           <a:solidFill>
-            <a:srgbClr val="D9985F"/>
+            <a:srgbClr val="7367FF"/>
           </a:solidFill>
           <a:ln>
             <a:noFill/>
@@ -3640,14 +3429,14 @@
         </p:nvSpPr>
         <p:spPr>
           <a:xfrm>
-            <a:off x="92448" y="171072"/>
-            <a:ext cx="88704" cy="101376"/>
+            <a:off x="2397600" y="633600"/>
+            <a:ext cx="532800" cy="532800"/>
           </a:xfrm>
           <a:prstGeom prst="ellipse">
             <a:avLst/>
           </a:prstGeom>
           <a:noFill/>
-          <a:ln w="12672">
+          <a:ln w="10800">
             <a:solidFill>
               <a:srgbClr val="FFFFFF"/>
             </a:solidFill>
@@ -3663,76 +3452,14 @@
       </p:sp>
       <p:sp>
         <p:nvSpPr>
-          <p:cNvPr id="4" name="Oval 3"/>
-          <p:cNvSpPr/>
+          <p:cNvPr id="4" name="텍스트"/>
+          <p:cNvSpPr txBox="1"/>
           <p:nvPr/>
         </p:nvSpPr>
         <p:spPr>
           <a:xfrm>
-            <a:off x="106704" y="185328"/>
-            <a:ext cx="60192" cy="72864"/>
-          </a:xfrm>
-          <a:prstGeom prst="ellipse">
-            <a:avLst/>
-          </a:prstGeom>
-          <a:solidFill>
-            <a:srgbClr val="FFFFFF">
-              <a:alpha val="35000"/>
-            </a:srgbClr>
-          </a:solidFill>
-          <a:ln>
-            <a:noFill/>
-          </a:ln>
-        </p:spPr>
-        <p:txBody>
-          <a:bodyPr rtlCol="0" anchor="ctr"/>
-          <a:lstStyle/>
-          <a:p>
-            <a:pPr algn="ctr"/>
-          </a:p>
-        </p:txBody>
-      </p:sp>
-      <p:sp>
-        <p:nvSpPr>
-          <p:cNvPr id="5" name="Rounded Rectangle 4"/>
-          <p:cNvSpPr/>
-          <p:nvPr/>
-        </p:nvSpPr>
-        <p:spPr>
-          <a:xfrm>
-            <a:off x="128880" y="269280"/>
-            <a:ext cx="15840" cy="47520"/>
-          </a:xfrm>
-          <a:prstGeom prst="roundRect">
-            <a:avLst>
-              <a:gd name="adj" fmla="val 50000"/>
-            </a:avLst>
-          </a:prstGeom>
-          <a:solidFill>
-            <a:srgbClr val="FFFFFF"/>
-          </a:solidFill>
-          <a:ln>
-            <a:noFill/>
-          </a:ln>
-        </p:spPr>
-        <p:txBody>
-          <a:bodyPr rtlCol="0" anchor="ctr"/>
-          <a:lstStyle/>
-          <a:p>
-            <a:pPr algn="ctr"/>
-          </a:p>
-        </p:txBody>
-      </p:sp>
-      <p:sp>
-        <p:nvSpPr>
-          <p:cNvPr id="6" name="텍스트"/>
-          <p:cNvSpPr txBox="1"/>
-          <p:nvPr/>
-        </p:nvSpPr>
-        <p:spPr>
-          <a:xfrm>
-            <a:off x="504000" y="396000"/>
-            <a:ext cx="1800000" cy="720000"/>
+            <a:off x="2304000" y="684000"/>
+            <a:ext cx="720000" cy="432000"/>
           </a:xfrm>
           <a:prstGeom prst="rect">
             <a:avLst/>
@@ -3745,34 +3472,34 @@
           </a:bodyPr>
           <a:lstStyle/>
           <a:p>
-            <a:pPr algn="l">
+            <a:pPr algn="ctr">
               <a:lnSpc>
-                <a:spcPts val="1667"/>
+                <a:spcPts val="4350"/>
               </a:lnSpc>
             </a:pPr>
             <a:r>
-              <a:rPr sz="1150" b="1">
+              <a:rPr sz="3000" b="1">
                 <a:solidFill>
                   <a:srgbClr val="FFFFFF"/>
                 </a:solidFill>
-                <a:latin typeface="바탕"/>
-                <a:ea typeface="바탕"/>
+                <a:latin typeface="맑은 고딕"/>
+                <a:ea typeface="맑은 고딕"/>
               </a:rPr>
-              <a:t>피부에도 쉼표가 필요해요</a:t>
-            </a:r>
-          </a:p>
-        </p:txBody>
-      </p:sp>
-      <p:sp>
-        <p:nvSpPr>
-          <p:cNvPr id="7" name="텍스트"/>
+              <a:t>샵</a:t>
+            </a:r>
+          </a:p>
+        </p:txBody>
+      </p:sp>
+      <p:sp>
+        <p:nvSpPr>
+          <p:cNvPr id="5" name="텍스트"/>
           <p:cNvSpPr txBox="1"/>
           <p:nvPr/>
         </p:nvSpPr>
         <p:spPr>
           <a:xfrm>
-            <a:off x="504000" y="1260000"/>
-            <a:ext cx="1728000" cy="108000"/>
+            <a:off x="252000" y="540000"/>
+            <a:ext cx="1620000" cy="720000"/>
           </a:xfrm>
           <a:prstGeom prst="rect">
             <a:avLst/>
@@ -3787,62 +3514,49 @@
           <a:p>
             <a:pPr algn="l">
               <a:lnSpc>
-                <a:spcPts val="1087"/>
+                <a:spcPts val="1739"/>
               </a:lnSpc>
             </a:pPr>
             <a:r>
-              <a:rPr sz="750" b="1" spc="200">
+              <a:rPr sz="1200" b="1">
                 <a:solidFill>
-                  <a:srgbClr val="CEBCAC"/>
+                  <a:srgbClr val="FFFFFF"/>
                 </a:solidFill>
                 <a:latin typeface="맑은 고딕"/>
                 <a:ea typeface="맑은 고딕"/>
               </a:rPr>
-              <a:t>샵 이름</a:t>
-            </a:r>
-          </a:p>
-        </p:txBody>
-      </p:sp>
-      <p:sp>
-        <p:nvSpPr>
-          <p:cNvPr id="8" name="Rectangle 7"/>
-          <p:cNvSpPr/>
+              <a:t>피부에도 쉼표가</a:t>
+            </a:r>
+          </a:p>
+          <a:p>
+            <a:pPr algn="l">
+              <a:lnSpc>
+                <a:spcPts val="1739"/>
+              </a:lnSpc>
+            </a:pPr>
+            <a:r>
+              <a:rPr sz="1200" b="1">
+                <a:solidFill>
+                  <a:srgbClr val="FFFFFF"/>
+                </a:solidFill>
+                <a:latin typeface="맑은 고딕"/>
+                <a:ea typeface="맑은 고딕"/>
+              </a:rPr>
+              <a:t>필요해요</a:t>
+            </a:r>
+          </a:p>
+        </p:txBody>
+      </p:sp>
+      <p:sp>
+        <p:nvSpPr>
+          <p:cNvPr id="6" name="텍스트"/>
+          <p:cNvSpPr txBox="1"/>
           <p:nvPr/>
         </p:nvSpPr>
         <p:spPr>
           <a:xfrm>
-            <a:off x="2520000" y="216000"/>
-            <a:ext cx="468000" cy="468000"/>
-          </a:xfrm>
-          <a:prstGeom prst="rect">
-            <a:avLst/>
-          </a:prstGeom>
-          <a:noFill/>
-          <a:ln w="9000">
-            <a:solidFill>
-              <a:srgbClr val="D9985F"/>
-            </a:solidFill>
-            <a:prstDash val="dash"/>
-          </a:ln>
-        </p:spPr>
-        <p:txBody>
-          <a:bodyPr rtlCol="0" anchor="ctr"/>
-          <a:lstStyle/>
-          <a:p>
-            <a:pPr algn="ctr"/>
-          </a:p>
-        </p:txBody>
-      </p:sp>
-      <p:sp>
-        <p:nvSpPr>
-          <p:cNvPr id="9" name="텍스트"/>
-          <p:cNvSpPr txBox="1"/>
-          <p:nvPr/>
-        </p:nvSpPr>
-        <p:spPr>
-          <a:xfrm>
-            <a:off x="2520000" y="216000"/>
-            <a:ext cx="468000" cy="468000"/>
+            <a:off x="252000" y="1512000"/>
+            <a:ext cx="1584000" cy="123826"/>
           </a:xfrm>
           <a:prstGeom prst="rect">
             <a:avLst/>
@@ -3850,25 +3564,25 @@
           <a:noFill/>
         </p:spPr>
         <p:txBody>
-          <a:bodyPr wrap="square" lIns="0" rIns="0" tIns="0" bIns="0" anchor="ctr">
+          <a:bodyPr wrap="square" lIns="0" rIns="0" tIns="0" bIns="0" anchor="t">
             <a:spAutoFit/>
           </a:bodyPr>
           <a:lstStyle/>
           <a:p>
-            <a:pPr algn="ctr">
+            <a:pPr algn="l">
               <a:lnSpc>
-                <a:spcPts val="1305"/>
+                <a:spcPts val="942"/>
               </a:lnSpc>
             </a:pPr>
             <a:r>
-              <a:rPr sz="900" b="1">
+              <a:rPr sz="650" b="1" spc="200">
                 <a:solidFill>
-                  <a:srgbClr val="CEBCAC"/>
+                  <a:srgbClr val="A3A9B5"/>
                 </a:solidFill>
                 <a:latin typeface="맑은 고딕"/>
                 <a:ea typeface="맑은 고딕"/>
               </a:rPr>
-              <a:t>QR</a:t>
+              <a:t>샵 이름</a:t>
             </a:r>
           </a:p>
         </p:txBody>

--- a/public/fun/cards/beauty/beauty-18.pptx
+++ b/public/fun/cards/beauty/beauty-18.pptx
@@ -3105,8 +3105,8 @@
         </p:nvSpPr>
         <p:spPr>
           <a:xfrm>
-            <a:off x="252000" y="223200"/>
-            <a:ext cx="2016000" cy="133351"/>
+            <a:off x="252000" y="252000"/>
+            <a:ext cx="1512000" cy="123826"/>
           </a:xfrm>
           <a:prstGeom prst="rect">
             <a:avLst/>
@@ -3121,11 +3121,11 @@
           <a:p>
             <a:pPr algn="l">
               <a:lnSpc>
-                <a:spcPts val="1015"/>
+                <a:spcPts val="942"/>
               </a:lnSpc>
             </a:pPr>
             <a:r>
-              <a:rPr sz="700" b="1" spc="200">
+              <a:rPr sz="650" b="1" spc="220">
                 <a:solidFill>
                   <a:srgbClr val="6B7280"/>
                 </a:solidFill>
@@ -3137,16 +3137,37 @@
           </a:p>
         </p:txBody>
       </p:sp>
-      <p:sp>
-        <p:nvSpPr>
-          <p:cNvPr id="3" name="텍스트"/>
+      <p:cxnSp>
+        <p:nvCxnSpPr>
+          <p:cNvPr id="3" name="Connector 2"/>
+          <p:cNvCxnSpPr/>
+          <p:nvPr/>
+        </p:nvCxnSpPr>
+        <p:spPr>
+          <a:xfrm>
+            <a:off x="252000" y="388800"/>
+            <a:ext cx="2736000" cy="0"/>
+          </a:xfrm>
+          <a:prstGeom prst="line">
+            <a:avLst/>
+          </a:prstGeom>
+          <a:ln w="3600">
+            <a:solidFill>
+              <a:srgbClr val="DCDFE4"/>
+            </a:solidFill>
+          </a:ln>
+        </p:spPr>
+      </p:cxnSp>
+      <p:sp>
+        <p:nvSpPr>
+          <p:cNvPr id="4" name="텍스트"/>
           <p:cNvSpPr txBox="1"/>
           <p:nvPr/>
         </p:nvSpPr>
         <p:spPr>
           <a:xfrm>
-            <a:off x="252000" y="468000"/>
-            <a:ext cx="2520000" cy="360000"/>
+            <a:off x="252000" y="576000"/>
+            <a:ext cx="1800000" cy="237600"/>
           </a:xfrm>
           <a:prstGeom prst="rect">
             <a:avLst/>
@@ -3161,11 +3182,11 @@
           <a:p>
             <a:pPr algn="l">
               <a:lnSpc>
-                <a:spcPts val="3190"/>
+                <a:spcPts val="1957"/>
               </a:lnSpc>
             </a:pPr>
             <a:r>
-              <a:rPr sz="2200" b="1">
+              <a:rPr sz="1350" b="1" spc="120">
                 <a:solidFill>
                   <a:srgbClr val="12151C"/>
                 </a:solidFill>
@@ -3179,14 +3200,14 @@
       </p:sp>
       <p:sp>
         <p:nvSpPr>
-          <p:cNvPr id="4" name="텍스트"/>
+          <p:cNvPr id="5" name="텍스트"/>
           <p:cNvSpPr txBox="1"/>
           <p:nvPr/>
         </p:nvSpPr>
         <p:spPr>
           <a:xfrm>
-            <a:off x="252000" y="871200"/>
-            <a:ext cx="2520000" cy="171451"/>
+            <a:off x="252000" y="828000"/>
+            <a:ext cx="1800000" cy="133351"/>
           </a:xfrm>
           <a:prstGeom prst="rect">
             <a:avLst/>
@@ -3201,11 +3222,11 @@
           <a:p>
             <a:pPr algn="l">
               <a:lnSpc>
-                <a:spcPts val="1305"/>
+                <a:spcPts val="1015"/>
               </a:lnSpc>
             </a:pPr>
             <a:r>
-              <a:rPr sz="900" b="0">
+              <a:rPr sz="700" b="0" spc="60">
                 <a:solidFill>
                   <a:srgbClr val="6B7280"/>
                 </a:solidFill>
@@ -3219,14 +3240,14 @@
       </p:sp>
       <p:sp>
         <p:nvSpPr>
-          <p:cNvPr id="5" name="텍스트"/>
+          <p:cNvPr id="6" name="텍스트"/>
           <p:cNvSpPr txBox="1"/>
           <p:nvPr/>
         </p:nvSpPr>
         <p:spPr>
           <a:xfrm>
-            <a:off x="252000" y="1216800"/>
-            <a:ext cx="2520000" cy="129541"/>
+            <a:off x="252000" y="1036800"/>
+            <a:ext cx="2520000" cy="123826"/>
           </a:xfrm>
           <a:prstGeom prst="rect">
             <a:avLst/>
@@ -3241,11 +3262,11 @@
           <a:p>
             <a:pPr algn="l">
               <a:lnSpc>
-                <a:spcPts val="986"/>
+                <a:spcPts val="942"/>
               </a:lnSpc>
             </a:pPr>
             <a:r>
-              <a:rPr sz="680" b="0">
+              <a:rPr sz="650" b="0">
                 <a:solidFill>
                   <a:srgbClr val="6B7280"/>
                 </a:solidFill>
@@ -3259,14 +3280,14 @@
       </p:sp>
       <p:sp>
         <p:nvSpPr>
-          <p:cNvPr id="6" name="Rectangle 5"/>
+          <p:cNvPr id="7" name="Rectangle 6"/>
           <p:cNvSpPr/>
           <p:nvPr/>
         </p:nvSpPr>
         <p:spPr>
           <a:xfrm>
-            <a:off x="0" y="1476000"/>
-            <a:ext cx="3240000" cy="324000"/>
+            <a:off x="0" y="1339200"/>
+            <a:ext cx="3240000" cy="460800"/>
           </a:xfrm>
           <a:prstGeom prst="rect">
             <a:avLst/>
@@ -3288,14 +3309,14 @@
       </p:sp>
       <p:sp>
         <p:nvSpPr>
-          <p:cNvPr id="7" name="텍스트"/>
+          <p:cNvPr id="8" name="텍스트"/>
           <p:cNvSpPr txBox="1"/>
           <p:nvPr/>
         </p:nvSpPr>
         <p:spPr>
           <a:xfrm>
-            <a:off x="252000" y="1569600"/>
-            <a:ext cx="1296000" cy="133351"/>
+            <a:off x="252000" y="1476000"/>
+            <a:ext cx="936000" cy="91441"/>
           </a:xfrm>
           <a:prstGeom prst="rect">
             <a:avLst/>
@@ -3310,11 +3331,53 @@
           <a:p>
             <a:pPr algn="l">
               <a:lnSpc>
-                <a:spcPts val="1015"/>
+                <a:spcPts val="696"/>
               </a:lnSpc>
             </a:pPr>
             <a:r>
-              <a:rPr sz="700" b="1">
+              <a:rPr sz="480" b="1" spc="140">
+                <a:solidFill>
+                  <a:srgbClr val="FFFFFF">
+                    <a:alpha val="70000"/>
+                  </a:srgbClr>
+                </a:solidFill>
+                <a:latin typeface="맑은 고딕"/>
+                <a:ea typeface="맑은 고딕"/>
+              </a:rPr>
+              <a:t>TEL</a:t>
+            </a:r>
+          </a:p>
+        </p:txBody>
+      </p:sp>
+      <p:sp>
+        <p:nvSpPr>
+          <p:cNvPr id="9" name="텍스트"/>
+          <p:cNvSpPr txBox="1"/>
+          <p:nvPr/>
+        </p:nvSpPr>
+        <p:spPr>
+          <a:xfrm>
+            <a:off x="252000" y="1576800"/>
+            <a:ext cx="936000" cy="123826"/>
+          </a:xfrm>
+          <a:prstGeom prst="rect">
+            <a:avLst/>
+          </a:prstGeom>
+          <a:noFill/>
+        </p:spPr>
+        <p:txBody>
+          <a:bodyPr wrap="square" lIns="0" rIns="0" tIns="0" bIns="0" anchor="t">
+            <a:spAutoFit/>
+          </a:bodyPr>
+          <a:lstStyle/>
+          <a:p>
+            <a:pPr algn="l">
+              <a:lnSpc>
+                <a:spcPts val="942"/>
+              </a:lnSpc>
+            </a:pPr>
+            <a:r>
+              <a:rPr sz="650" b="1">
                 <a:solidFill>
                   <a:srgbClr val="FFFFFF"/>
                 </a:solidFill>
@@ -3328,14 +3391,14 @@
       </p:sp>
       <p:sp>
         <p:nvSpPr>
-          <p:cNvPr id="8" name="텍스트"/>
+          <p:cNvPr id="10" name="텍스트"/>
           <p:cNvSpPr txBox="1"/>
           <p:nvPr/>
         </p:nvSpPr>
         <p:spPr>
           <a:xfrm>
-            <a:off x="1656000" y="1569600"/>
-            <a:ext cx="1368000" cy="133351"/>
+            <a:off x="1188000" y="1476000"/>
+            <a:ext cx="1080000" cy="91441"/>
           </a:xfrm>
           <a:prstGeom prst="rect">
             <a:avLst/>
@@ -3350,11 +3413,53 @@
           <a:p>
             <a:pPr algn="l">
               <a:lnSpc>
-                <a:spcPts val="1015"/>
+                <a:spcPts val="696"/>
               </a:lnSpc>
             </a:pPr>
             <a:r>
-              <a:rPr sz="700" b="1">
+              <a:rPr sz="480" b="1" spc="140">
+                <a:solidFill>
+                  <a:srgbClr val="FFFFFF">
+                    <a:alpha val="70000"/>
+                  </a:srgbClr>
+                </a:solidFill>
+                <a:latin typeface="맑은 고딕"/>
+                <a:ea typeface="맑은 고딕"/>
+              </a:rPr>
+              <a:t>MAIL</a:t>
+            </a:r>
+          </a:p>
+        </p:txBody>
+      </p:sp>
+      <p:sp>
+        <p:nvSpPr>
+          <p:cNvPr id="11" name="텍스트"/>
+          <p:cNvSpPr txBox="1"/>
+          <p:nvPr/>
+        </p:nvSpPr>
+        <p:spPr>
+          <a:xfrm>
+            <a:off x="1188000" y="1576800"/>
+            <a:ext cx="1080000" cy="123826"/>
+          </a:xfrm>
+          <a:prstGeom prst="rect">
+            <a:avLst/>
+          </a:prstGeom>
+          <a:noFill/>
+        </p:spPr>
+        <p:txBody>
+          <a:bodyPr wrap="square" lIns="0" rIns="0" tIns="0" bIns="0" anchor="t">
+            <a:spAutoFit/>
+          </a:bodyPr>
+          <a:lstStyle/>
+          <a:p>
+            <a:pPr algn="l">
+              <a:lnSpc>
+                <a:spcPts val="942"/>
+              </a:lnSpc>
+            </a:pPr>
+            <a:r>
+              <a:rPr sz="650" b="1">
                 <a:solidFill>
                   <a:srgbClr val="FFFFFF"/>
                 </a:solidFill>
@@ -3366,6 +3471,27 @@
           </a:p>
         </p:txBody>
       </p:sp>
+      <p:cxnSp>
+        <p:nvCxnSpPr>
+          <p:cNvPr id="12" name="Connector 11"/>
+          <p:cNvCxnSpPr/>
+          <p:nvPr/>
+        </p:nvCxnSpPr>
+        <p:spPr>
+          <a:xfrm>
+            <a:off x="1108800" y="1468800"/>
+            <a:ext cx="0" cy="208800"/>
+          </a:xfrm>
+          <a:prstGeom prst="line">
+            <a:avLst/>
+          </a:prstGeom>
+          <a:ln w="3600">
+            <a:solidFill>
+              <a:srgbClr val="FFFFFF"/>
+            </a:solidFill>
+          </a:ln>
+        </p:spPr>
+      </p:cxnSp>
     </p:spTree>
   </p:cSld>
   <p:clrMapOvr>
@@ -3400,8 +3526,8 @@
         </p:nvSpPr>
         <p:spPr>
           <a:xfrm>
-            <a:off x="2088000" y="0"/>
-            <a:ext cx="1152000" cy="1800000"/>
+            <a:off x="0" y="0"/>
+            <a:ext cx="1188000" cy="1800000"/>
           </a:xfrm>
           <a:prstGeom prst="rect">
             <a:avLst/>
@@ -3421,27 +3547,657 @@
           </a:p>
         </p:txBody>
       </p:sp>
-      <p:sp>
-        <p:nvSpPr>
-          <p:cNvPr id="3" name="Oval 2"/>
-          <p:cNvSpPr/>
-          <p:nvPr/>
-        </p:nvSpPr>
-        <p:spPr>
-          <a:xfrm>
-            <a:off x="2397600" y="633600"/>
-            <a:ext cx="532800" cy="532800"/>
-          </a:xfrm>
-          <a:prstGeom prst="ellipse">
-            <a:avLst/>
-          </a:prstGeom>
-          <a:noFill/>
-          <a:ln w="10800">
+      <p:cxnSp>
+        <p:nvCxnSpPr>
+          <p:cNvPr id="3" name="Connector 2"/>
+          <p:cNvCxnSpPr/>
+          <p:nvPr/>
+        </p:nvCxnSpPr>
+        <p:spPr>
+          <a:xfrm flipV="1">
+            <a:off x="0" y="1224000"/>
+            <a:ext cx="57600" cy="57600"/>
+          </a:xfrm>
+          <a:prstGeom prst="line">
+            <a:avLst/>
+          </a:prstGeom>
+          <a:ln w="3600">
             <a:solidFill>
               <a:srgbClr val="FFFFFF"/>
             </a:solidFill>
           </a:ln>
         </p:spPr>
+      </p:cxnSp>
+      <p:cxnSp>
+        <p:nvCxnSpPr>
+          <p:cNvPr id="4" name="Connector 3"/>
+          <p:cNvCxnSpPr/>
+          <p:nvPr/>
+        </p:nvCxnSpPr>
+        <p:spPr>
+          <a:xfrm flipV="1">
+            <a:off x="0" y="1224000"/>
+            <a:ext cx="115200" cy="115200"/>
+          </a:xfrm>
+          <a:prstGeom prst="line">
+            <a:avLst/>
+          </a:prstGeom>
+          <a:ln w="3600">
+            <a:solidFill>
+              <a:srgbClr val="FFFFFF"/>
+            </a:solidFill>
+          </a:ln>
+        </p:spPr>
+      </p:cxnSp>
+      <p:cxnSp>
+        <p:nvCxnSpPr>
+          <p:cNvPr id="5" name="Connector 4"/>
+          <p:cNvCxnSpPr/>
+          <p:nvPr/>
+        </p:nvCxnSpPr>
+        <p:spPr>
+          <a:xfrm flipV="1">
+            <a:off x="0" y="1224000"/>
+            <a:ext cx="172800" cy="172800"/>
+          </a:xfrm>
+          <a:prstGeom prst="line">
+            <a:avLst/>
+          </a:prstGeom>
+          <a:ln w="3600">
+            <a:solidFill>
+              <a:srgbClr val="FFFFFF"/>
+            </a:solidFill>
+          </a:ln>
+        </p:spPr>
+      </p:cxnSp>
+      <p:cxnSp>
+        <p:nvCxnSpPr>
+          <p:cNvPr id="6" name="Connector 5"/>
+          <p:cNvCxnSpPr/>
+          <p:nvPr/>
+        </p:nvCxnSpPr>
+        <p:spPr>
+          <a:xfrm flipV="1">
+            <a:off x="0" y="1224000"/>
+            <a:ext cx="230400" cy="230400"/>
+          </a:xfrm>
+          <a:prstGeom prst="line">
+            <a:avLst/>
+          </a:prstGeom>
+          <a:ln w="3600">
+            <a:solidFill>
+              <a:srgbClr val="FFFFFF"/>
+            </a:solidFill>
+          </a:ln>
+        </p:spPr>
+      </p:cxnSp>
+      <p:cxnSp>
+        <p:nvCxnSpPr>
+          <p:cNvPr id="7" name="Connector 6"/>
+          <p:cNvCxnSpPr/>
+          <p:nvPr/>
+        </p:nvCxnSpPr>
+        <p:spPr>
+          <a:xfrm flipV="1">
+            <a:off x="0" y="1224000"/>
+            <a:ext cx="288000" cy="288000"/>
+          </a:xfrm>
+          <a:prstGeom prst="line">
+            <a:avLst/>
+          </a:prstGeom>
+          <a:ln w="3600">
+            <a:solidFill>
+              <a:srgbClr val="FFFFFF"/>
+            </a:solidFill>
+          </a:ln>
+        </p:spPr>
+      </p:cxnSp>
+      <p:cxnSp>
+        <p:nvCxnSpPr>
+          <p:cNvPr id="8" name="Connector 7"/>
+          <p:cNvCxnSpPr/>
+          <p:nvPr/>
+        </p:nvCxnSpPr>
+        <p:spPr>
+          <a:xfrm flipV="1">
+            <a:off x="0" y="1224000"/>
+            <a:ext cx="345600" cy="345600"/>
+          </a:xfrm>
+          <a:prstGeom prst="line">
+            <a:avLst/>
+          </a:prstGeom>
+          <a:ln w="3600">
+            <a:solidFill>
+              <a:srgbClr val="FFFFFF"/>
+            </a:solidFill>
+          </a:ln>
+        </p:spPr>
+      </p:cxnSp>
+      <p:cxnSp>
+        <p:nvCxnSpPr>
+          <p:cNvPr id="9" name="Connector 8"/>
+          <p:cNvCxnSpPr/>
+          <p:nvPr/>
+        </p:nvCxnSpPr>
+        <p:spPr>
+          <a:xfrm flipV="1">
+            <a:off x="0" y="1224000"/>
+            <a:ext cx="403200" cy="403200"/>
+          </a:xfrm>
+          <a:prstGeom prst="line">
+            <a:avLst/>
+          </a:prstGeom>
+          <a:ln w="3600">
+            <a:solidFill>
+              <a:srgbClr val="FFFFFF"/>
+            </a:solidFill>
+          </a:ln>
+        </p:spPr>
+      </p:cxnSp>
+      <p:cxnSp>
+        <p:nvCxnSpPr>
+          <p:cNvPr id="10" name="Connector 9"/>
+          <p:cNvCxnSpPr/>
+          <p:nvPr/>
+        </p:nvCxnSpPr>
+        <p:spPr>
+          <a:xfrm flipV="1">
+            <a:off x="0" y="1224000"/>
+            <a:ext cx="460800" cy="460800"/>
+          </a:xfrm>
+          <a:prstGeom prst="line">
+            <a:avLst/>
+          </a:prstGeom>
+          <a:ln w="3600">
+            <a:solidFill>
+              <a:srgbClr val="FFFFFF"/>
+            </a:solidFill>
+          </a:ln>
+        </p:spPr>
+      </p:cxnSp>
+      <p:cxnSp>
+        <p:nvCxnSpPr>
+          <p:cNvPr id="11" name="Connector 10"/>
+          <p:cNvCxnSpPr/>
+          <p:nvPr/>
+        </p:nvCxnSpPr>
+        <p:spPr>
+          <a:xfrm flipV="1">
+            <a:off x="0" y="1224000"/>
+            <a:ext cx="518400" cy="518400"/>
+          </a:xfrm>
+          <a:prstGeom prst="line">
+            <a:avLst/>
+          </a:prstGeom>
+          <a:ln w="3600">
+            <a:solidFill>
+              <a:srgbClr val="FFFFFF"/>
+            </a:solidFill>
+          </a:ln>
+        </p:spPr>
+      </p:cxnSp>
+      <p:cxnSp>
+        <p:nvCxnSpPr>
+          <p:cNvPr id="12" name="Connector 11"/>
+          <p:cNvCxnSpPr/>
+          <p:nvPr/>
+        </p:nvCxnSpPr>
+        <p:spPr>
+          <a:xfrm flipV="1">
+            <a:off x="0" y="1224000"/>
+            <a:ext cx="576000" cy="576000"/>
+          </a:xfrm>
+          <a:prstGeom prst="line">
+            <a:avLst/>
+          </a:prstGeom>
+          <a:ln w="3600">
+            <a:solidFill>
+              <a:srgbClr val="FFFFFF"/>
+            </a:solidFill>
+          </a:ln>
+        </p:spPr>
+      </p:cxnSp>
+      <p:cxnSp>
+        <p:nvCxnSpPr>
+          <p:cNvPr id="13" name="Connector 12"/>
+          <p:cNvCxnSpPr/>
+          <p:nvPr/>
+        </p:nvCxnSpPr>
+        <p:spPr>
+          <a:xfrm flipV="1">
+            <a:off x="57600" y="1224000"/>
+            <a:ext cx="576000" cy="576000"/>
+          </a:xfrm>
+          <a:prstGeom prst="line">
+            <a:avLst/>
+          </a:prstGeom>
+          <a:ln w="3600">
+            <a:solidFill>
+              <a:srgbClr val="FFFFFF"/>
+            </a:solidFill>
+          </a:ln>
+        </p:spPr>
+      </p:cxnSp>
+      <p:cxnSp>
+        <p:nvCxnSpPr>
+          <p:cNvPr id="14" name="Connector 13"/>
+          <p:cNvCxnSpPr/>
+          <p:nvPr/>
+        </p:nvCxnSpPr>
+        <p:spPr>
+          <a:xfrm flipV="1">
+            <a:off x="115200" y="1224000"/>
+            <a:ext cx="576000" cy="576000"/>
+          </a:xfrm>
+          <a:prstGeom prst="line">
+            <a:avLst/>
+          </a:prstGeom>
+          <a:ln w="3600">
+            <a:solidFill>
+              <a:srgbClr val="FFFFFF"/>
+            </a:solidFill>
+          </a:ln>
+        </p:spPr>
+      </p:cxnSp>
+      <p:cxnSp>
+        <p:nvCxnSpPr>
+          <p:cNvPr id="15" name="Connector 14"/>
+          <p:cNvCxnSpPr/>
+          <p:nvPr/>
+        </p:nvCxnSpPr>
+        <p:spPr>
+          <a:xfrm flipV="1">
+            <a:off x="172800" y="1224000"/>
+            <a:ext cx="576000" cy="576000"/>
+          </a:xfrm>
+          <a:prstGeom prst="line">
+            <a:avLst/>
+          </a:prstGeom>
+          <a:ln w="3600">
+            <a:solidFill>
+              <a:srgbClr val="FFFFFF"/>
+            </a:solidFill>
+          </a:ln>
+        </p:spPr>
+      </p:cxnSp>
+      <p:cxnSp>
+        <p:nvCxnSpPr>
+          <p:cNvPr id="16" name="Connector 15"/>
+          <p:cNvCxnSpPr/>
+          <p:nvPr/>
+        </p:nvCxnSpPr>
+        <p:spPr>
+          <a:xfrm flipV="1">
+            <a:off x="230400" y="1224000"/>
+            <a:ext cx="576000" cy="576000"/>
+          </a:xfrm>
+          <a:prstGeom prst="line">
+            <a:avLst/>
+          </a:prstGeom>
+          <a:ln w="3600">
+            <a:solidFill>
+              <a:srgbClr val="FFFFFF"/>
+            </a:solidFill>
+          </a:ln>
+        </p:spPr>
+      </p:cxnSp>
+      <p:cxnSp>
+        <p:nvCxnSpPr>
+          <p:cNvPr id="17" name="Connector 16"/>
+          <p:cNvCxnSpPr/>
+          <p:nvPr/>
+        </p:nvCxnSpPr>
+        <p:spPr>
+          <a:xfrm flipV="1">
+            <a:off x="288000" y="1224000"/>
+            <a:ext cx="576000" cy="576000"/>
+          </a:xfrm>
+          <a:prstGeom prst="line">
+            <a:avLst/>
+          </a:prstGeom>
+          <a:ln w="3600">
+            <a:solidFill>
+              <a:srgbClr val="FFFFFF"/>
+            </a:solidFill>
+          </a:ln>
+        </p:spPr>
+      </p:cxnSp>
+      <p:cxnSp>
+        <p:nvCxnSpPr>
+          <p:cNvPr id="18" name="Connector 17"/>
+          <p:cNvCxnSpPr/>
+          <p:nvPr/>
+        </p:nvCxnSpPr>
+        <p:spPr>
+          <a:xfrm flipV="1">
+            <a:off x="345600" y="1224000"/>
+            <a:ext cx="576000" cy="576000"/>
+          </a:xfrm>
+          <a:prstGeom prst="line">
+            <a:avLst/>
+          </a:prstGeom>
+          <a:ln w="3600">
+            <a:solidFill>
+              <a:srgbClr val="FFFFFF"/>
+            </a:solidFill>
+          </a:ln>
+        </p:spPr>
+      </p:cxnSp>
+      <p:cxnSp>
+        <p:nvCxnSpPr>
+          <p:cNvPr id="19" name="Connector 18"/>
+          <p:cNvCxnSpPr/>
+          <p:nvPr/>
+        </p:nvCxnSpPr>
+        <p:spPr>
+          <a:xfrm flipV="1">
+            <a:off x="403200" y="1224000"/>
+            <a:ext cx="576000" cy="576000"/>
+          </a:xfrm>
+          <a:prstGeom prst="line">
+            <a:avLst/>
+          </a:prstGeom>
+          <a:ln w="3600">
+            <a:solidFill>
+              <a:srgbClr val="FFFFFF"/>
+            </a:solidFill>
+          </a:ln>
+        </p:spPr>
+      </p:cxnSp>
+      <p:cxnSp>
+        <p:nvCxnSpPr>
+          <p:cNvPr id="20" name="Connector 19"/>
+          <p:cNvCxnSpPr/>
+          <p:nvPr/>
+        </p:nvCxnSpPr>
+        <p:spPr>
+          <a:xfrm flipV="1">
+            <a:off x="460800" y="1224000"/>
+            <a:ext cx="576000" cy="576000"/>
+          </a:xfrm>
+          <a:prstGeom prst="line">
+            <a:avLst/>
+          </a:prstGeom>
+          <a:ln w="3600">
+            <a:solidFill>
+              <a:srgbClr val="FFFFFF"/>
+            </a:solidFill>
+          </a:ln>
+        </p:spPr>
+      </p:cxnSp>
+      <p:cxnSp>
+        <p:nvCxnSpPr>
+          <p:cNvPr id="21" name="Connector 20"/>
+          <p:cNvCxnSpPr/>
+          <p:nvPr/>
+        </p:nvCxnSpPr>
+        <p:spPr>
+          <a:xfrm flipV="1">
+            <a:off x="518400" y="1224000"/>
+            <a:ext cx="576000" cy="576000"/>
+          </a:xfrm>
+          <a:prstGeom prst="line">
+            <a:avLst/>
+          </a:prstGeom>
+          <a:ln w="3600">
+            <a:solidFill>
+              <a:srgbClr val="FFFFFF"/>
+            </a:solidFill>
+          </a:ln>
+        </p:spPr>
+      </p:cxnSp>
+      <p:cxnSp>
+        <p:nvCxnSpPr>
+          <p:cNvPr id="22" name="Connector 21"/>
+          <p:cNvCxnSpPr/>
+          <p:nvPr/>
+        </p:nvCxnSpPr>
+        <p:spPr>
+          <a:xfrm flipV="1">
+            <a:off x="576000" y="1224000"/>
+            <a:ext cx="576000" cy="576000"/>
+          </a:xfrm>
+          <a:prstGeom prst="line">
+            <a:avLst/>
+          </a:prstGeom>
+          <a:ln w="3600">
+            <a:solidFill>
+              <a:srgbClr val="FFFFFF"/>
+            </a:solidFill>
+          </a:ln>
+        </p:spPr>
+      </p:cxnSp>
+      <p:cxnSp>
+        <p:nvCxnSpPr>
+          <p:cNvPr id="23" name="Connector 22"/>
+          <p:cNvCxnSpPr/>
+          <p:nvPr/>
+        </p:nvCxnSpPr>
+        <p:spPr>
+          <a:xfrm flipV="1">
+            <a:off x="633600" y="1245600"/>
+            <a:ext cx="554400" cy="554400"/>
+          </a:xfrm>
+          <a:prstGeom prst="line">
+            <a:avLst/>
+          </a:prstGeom>
+          <a:ln w="3600">
+            <a:solidFill>
+              <a:srgbClr val="FFFFFF"/>
+            </a:solidFill>
+          </a:ln>
+        </p:spPr>
+      </p:cxnSp>
+      <p:cxnSp>
+        <p:nvCxnSpPr>
+          <p:cNvPr id="24" name="Connector 23"/>
+          <p:cNvCxnSpPr/>
+          <p:nvPr/>
+        </p:nvCxnSpPr>
+        <p:spPr>
+          <a:xfrm flipV="1">
+            <a:off x="691200" y="1303200"/>
+            <a:ext cx="496800" cy="496800"/>
+          </a:xfrm>
+          <a:prstGeom prst="line">
+            <a:avLst/>
+          </a:prstGeom>
+          <a:ln w="3600">
+            <a:solidFill>
+              <a:srgbClr val="FFFFFF"/>
+            </a:solidFill>
+          </a:ln>
+        </p:spPr>
+      </p:cxnSp>
+      <p:cxnSp>
+        <p:nvCxnSpPr>
+          <p:cNvPr id="25" name="Connector 24"/>
+          <p:cNvCxnSpPr/>
+          <p:nvPr/>
+        </p:nvCxnSpPr>
+        <p:spPr>
+          <a:xfrm flipV="1">
+            <a:off x="748800" y="1360800"/>
+            <a:ext cx="439200" cy="439200"/>
+          </a:xfrm>
+          <a:prstGeom prst="line">
+            <a:avLst/>
+          </a:prstGeom>
+          <a:ln w="3600">
+            <a:solidFill>
+              <a:srgbClr val="FFFFFF"/>
+            </a:solidFill>
+          </a:ln>
+        </p:spPr>
+      </p:cxnSp>
+      <p:cxnSp>
+        <p:nvCxnSpPr>
+          <p:cNvPr id="26" name="Connector 25"/>
+          <p:cNvCxnSpPr/>
+          <p:nvPr/>
+        </p:nvCxnSpPr>
+        <p:spPr>
+          <a:xfrm flipV="1">
+            <a:off x="806400" y="1418400"/>
+            <a:ext cx="381600" cy="381600"/>
+          </a:xfrm>
+          <a:prstGeom prst="line">
+            <a:avLst/>
+          </a:prstGeom>
+          <a:ln w="3600">
+            <a:solidFill>
+              <a:srgbClr val="FFFFFF"/>
+            </a:solidFill>
+          </a:ln>
+        </p:spPr>
+      </p:cxnSp>
+      <p:cxnSp>
+        <p:nvCxnSpPr>
+          <p:cNvPr id="27" name="Connector 26"/>
+          <p:cNvCxnSpPr/>
+          <p:nvPr/>
+        </p:nvCxnSpPr>
+        <p:spPr>
+          <a:xfrm flipV="1">
+            <a:off x="864000" y="1476000"/>
+            <a:ext cx="324000" cy="324000"/>
+          </a:xfrm>
+          <a:prstGeom prst="line">
+            <a:avLst/>
+          </a:prstGeom>
+          <a:ln w="3600">
+            <a:solidFill>
+              <a:srgbClr val="FFFFFF"/>
+            </a:solidFill>
+          </a:ln>
+        </p:spPr>
+      </p:cxnSp>
+      <p:cxnSp>
+        <p:nvCxnSpPr>
+          <p:cNvPr id="28" name="Connector 27"/>
+          <p:cNvCxnSpPr/>
+          <p:nvPr/>
+        </p:nvCxnSpPr>
+        <p:spPr>
+          <a:xfrm flipV="1">
+            <a:off x="921600" y="1533600"/>
+            <a:ext cx="266400" cy="266400"/>
+          </a:xfrm>
+          <a:prstGeom prst="line">
+            <a:avLst/>
+          </a:prstGeom>
+          <a:ln w="3600">
+            <a:solidFill>
+              <a:srgbClr val="FFFFFF"/>
+            </a:solidFill>
+          </a:ln>
+        </p:spPr>
+      </p:cxnSp>
+      <p:cxnSp>
+        <p:nvCxnSpPr>
+          <p:cNvPr id="29" name="Connector 28"/>
+          <p:cNvCxnSpPr/>
+          <p:nvPr/>
+        </p:nvCxnSpPr>
+        <p:spPr>
+          <a:xfrm flipV="1">
+            <a:off x="979200" y="1591200"/>
+            <a:ext cx="208800" cy="208800"/>
+          </a:xfrm>
+          <a:prstGeom prst="line">
+            <a:avLst/>
+          </a:prstGeom>
+          <a:ln w="3600">
+            <a:solidFill>
+              <a:srgbClr val="FFFFFF"/>
+            </a:solidFill>
+          </a:ln>
+        </p:spPr>
+      </p:cxnSp>
+      <p:cxnSp>
+        <p:nvCxnSpPr>
+          <p:cNvPr id="30" name="Connector 29"/>
+          <p:cNvCxnSpPr/>
+          <p:nvPr/>
+        </p:nvCxnSpPr>
+        <p:spPr>
+          <a:xfrm flipV="1">
+            <a:off x="1036800" y="1648800"/>
+            <a:ext cx="151200" cy="151200"/>
+          </a:xfrm>
+          <a:prstGeom prst="line">
+            <a:avLst/>
+          </a:prstGeom>
+          <a:ln w="3600">
+            <a:solidFill>
+              <a:srgbClr val="FFFFFF"/>
+            </a:solidFill>
+          </a:ln>
+        </p:spPr>
+      </p:cxnSp>
+      <p:cxnSp>
+        <p:nvCxnSpPr>
+          <p:cNvPr id="31" name="Connector 30"/>
+          <p:cNvCxnSpPr/>
+          <p:nvPr/>
+        </p:nvCxnSpPr>
+        <p:spPr>
+          <a:xfrm flipV="1">
+            <a:off x="1094400" y="1706400"/>
+            <a:ext cx="93600" cy="93600"/>
+          </a:xfrm>
+          <a:prstGeom prst="line">
+            <a:avLst/>
+          </a:prstGeom>
+          <a:ln w="3600">
+            <a:solidFill>
+              <a:srgbClr val="FFFFFF"/>
+            </a:solidFill>
+          </a:ln>
+        </p:spPr>
+      </p:cxnSp>
+      <p:cxnSp>
+        <p:nvCxnSpPr>
+          <p:cNvPr id="32" name="Connector 31"/>
+          <p:cNvCxnSpPr/>
+          <p:nvPr/>
+        </p:nvCxnSpPr>
+        <p:spPr>
+          <a:xfrm flipV="1">
+            <a:off x="1152000" y="1764000"/>
+            <a:ext cx="36000" cy="36000"/>
+          </a:xfrm>
+          <a:prstGeom prst="line">
+            <a:avLst/>
+          </a:prstGeom>
+          <a:ln w="3600">
+            <a:solidFill>
+              <a:srgbClr val="FFFFFF"/>
+            </a:solidFill>
+          </a:ln>
+        </p:spPr>
+      </p:cxnSp>
+      <p:sp>
+        <p:nvSpPr>
+          <p:cNvPr id="33" name="Oval 32"/>
+          <p:cNvSpPr/>
+          <p:nvPr/>
+        </p:nvSpPr>
+        <p:spPr>
+          <a:xfrm>
+            <a:off x="216000" y="252000"/>
+            <a:ext cx="288000" cy="288000"/>
+          </a:xfrm>
+          <a:prstGeom prst="ellipse">
+            <a:avLst/>
+          </a:prstGeom>
+          <a:noFill/>
+          <a:ln w="5760">
+            <a:solidFill>
+              <a:srgbClr val="FFFFFF"/>
+            </a:solidFill>
+          </a:ln>
+        </p:spPr>
         <p:txBody>
           <a:bodyPr rtlCol="0" anchor="ctr"/>
           <a:lstStyle/>
@@ -3452,14 +4208,14 @@
       </p:sp>
       <p:sp>
         <p:nvSpPr>
-          <p:cNvPr id="4" name="텍스트"/>
+          <p:cNvPr id="34" name="텍스트"/>
           <p:cNvSpPr txBox="1"/>
           <p:nvPr/>
         </p:nvSpPr>
         <p:spPr>
           <a:xfrm>
-            <a:off x="2304000" y="684000"/>
-            <a:ext cx="720000" cy="432000"/>
+            <a:off x="216000" y="252000"/>
+            <a:ext cx="288000" cy="288000"/>
           </a:xfrm>
           <a:prstGeom prst="rect">
             <a:avLst/>
@@ -3474,11 +4230,11 @@
           <a:p>
             <a:pPr algn="ctr">
               <a:lnSpc>
-                <a:spcPts val="4350"/>
+                <a:spcPts val="2030"/>
               </a:lnSpc>
             </a:pPr>
             <a:r>
-              <a:rPr sz="3000" b="1">
+              <a:rPr sz="1400" b="1">
                 <a:solidFill>
                   <a:srgbClr val="FFFFFF"/>
                 </a:solidFill>
@@ -3492,14 +4248,14 @@
       </p:sp>
       <p:sp>
         <p:nvSpPr>
-          <p:cNvPr id="5" name="텍스트"/>
+          <p:cNvPr id="35" name="텍스트"/>
           <p:cNvSpPr txBox="1"/>
           <p:nvPr/>
         </p:nvSpPr>
         <p:spPr>
           <a:xfrm>
-            <a:off x="252000" y="540000"/>
-            <a:ext cx="1620000" cy="720000"/>
+            <a:off x="216000" y="1440000"/>
+            <a:ext cx="828000" cy="142876"/>
           </a:xfrm>
           <a:prstGeom prst="rect">
             <a:avLst/>
@@ -3514,49 +4270,154 @@
           <a:p>
             <a:pPr algn="l">
               <a:lnSpc>
-                <a:spcPts val="1739"/>
+                <a:spcPts val="1087"/>
               </a:lnSpc>
             </a:pPr>
             <a:r>
-              <a:rPr sz="1200" b="1">
+              <a:rPr sz="750" b="1" spc="100">
                 <a:solidFill>
                   <a:srgbClr val="FFFFFF"/>
                 </a:solidFill>
                 <a:latin typeface="맑은 고딕"/>
                 <a:ea typeface="맑은 고딕"/>
               </a:rPr>
-              <a:t>피부에도 쉼표가</a:t>
-            </a:r>
-          </a:p>
+              <a:t>시술 안내</a:t>
+            </a:r>
+          </a:p>
+        </p:txBody>
+      </p:sp>
+      <p:sp>
+        <p:nvSpPr>
+          <p:cNvPr id="36" name="텍스트"/>
+          <p:cNvSpPr txBox="1"/>
+          <p:nvPr/>
+        </p:nvSpPr>
+        <p:spPr>
+          <a:xfrm>
+            <a:off x="1440000" y="223200"/>
+            <a:ext cx="1080000" cy="99061"/>
+          </a:xfrm>
+          <a:prstGeom prst="rect">
+            <a:avLst/>
+          </a:prstGeom>
+          <a:noFill/>
+        </p:spPr>
+        <p:txBody>
+          <a:bodyPr wrap="square" lIns="0" rIns="0" tIns="0" bIns="0" anchor="t">
+            <a:spAutoFit/>
+          </a:bodyPr>
+          <a:lstStyle/>
           <a:p>
             <a:pPr algn="l">
               <a:lnSpc>
-                <a:spcPts val="1739"/>
+                <a:spcPts val="754"/>
               </a:lnSpc>
             </a:pPr>
             <a:r>
-              <a:rPr sz="1200" b="1">
+              <a:rPr sz="520" b="1" spc="240">
+                <a:solidFill>
+                  <a:srgbClr val="A3A9B5"/>
+                </a:solidFill>
+                <a:latin typeface="맑은 고딕"/>
+                <a:ea typeface="맑은 고딕"/>
+              </a:rPr>
+              <a:t>시술 안내</a:t>
+            </a:r>
+          </a:p>
+        </p:txBody>
+      </p:sp>
+      <p:cxnSp>
+        <p:nvCxnSpPr>
+          <p:cNvPr id="37" name="Connector 36"/>
+          <p:cNvCxnSpPr/>
+          <p:nvPr/>
+        </p:nvCxnSpPr>
+        <p:spPr>
+          <a:xfrm>
+            <a:off x="1440000" y="360000"/>
+            <a:ext cx="1548000" cy="0"/>
+          </a:xfrm>
+          <a:prstGeom prst="line">
+            <a:avLst/>
+          </a:prstGeom>
+          <a:ln w="3600">
+            <a:solidFill>
+              <a:srgbClr val="2A2F38"/>
+            </a:solidFill>
+          </a:ln>
+        </p:spPr>
+      </p:cxnSp>
+      <p:sp>
+        <p:nvSpPr>
+          <p:cNvPr id="38" name="텍스트"/>
+          <p:cNvSpPr txBox="1"/>
+          <p:nvPr/>
+        </p:nvSpPr>
+        <p:spPr>
+          <a:xfrm>
+            <a:off x="1440000" y="403200"/>
+            <a:ext cx="1296000" cy="133351"/>
+          </a:xfrm>
+          <a:prstGeom prst="rect">
+            <a:avLst/>
+          </a:prstGeom>
+          <a:noFill/>
+        </p:spPr>
+        <p:txBody>
+          <a:bodyPr wrap="square" lIns="0" rIns="0" tIns="0" bIns="0" anchor="t">
+            <a:spAutoFit/>
+          </a:bodyPr>
+          <a:lstStyle/>
+          <a:p>
+            <a:pPr algn="l">
+              <a:lnSpc>
+                <a:spcPts val="1015"/>
+              </a:lnSpc>
+            </a:pPr>
+            <a:r>
+              <a:rPr sz="700" b="0">
                 <a:solidFill>
                   <a:srgbClr val="FFFFFF"/>
                 </a:solidFill>
                 <a:latin typeface="맑은 고딕"/>
                 <a:ea typeface="맑은 고딕"/>
               </a:rPr>
-              <a:t>필요해요</a:t>
-            </a:r>
-          </a:p>
-        </p:txBody>
-      </p:sp>
-      <p:sp>
-        <p:nvSpPr>
-          <p:cNvPr id="6" name="텍스트"/>
+              <a:t>커트</a:t>
+            </a:r>
+          </a:p>
+        </p:txBody>
+      </p:sp>
+      <p:cxnSp>
+        <p:nvCxnSpPr>
+          <p:cNvPr id="39" name="Connector 38"/>
+          <p:cNvCxnSpPr/>
+          <p:nvPr/>
+        </p:nvCxnSpPr>
+        <p:spPr>
+          <a:xfrm>
+            <a:off x="1440000" y="561600"/>
+            <a:ext cx="1548000" cy="0"/>
+          </a:xfrm>
+          <a:prstGeom prst="line">
+            <a:avLst/>
+          </a:prstGeom>
+          <a:ln w="3600">
+            <a:solidFill>
+              <a:srgbClr val="2A2F38"/>
+            </a:solidFill>
+          </a:ln>
+        </p:spPr>
+      </p:cxnSp>
+      <p:sp>
+        <p:nvSpPr>
+          <p:cNvPr id="40" name="텍스트"/>
           <p:cNvSpPr txBox="1"/>
           <p:nvPr/>
         </p:nvSpPr>
         <p:spPr>
           <a:xfrm>
-            <a:off x="252000" y="1512000"/>
-            <a:ext cx="1584000" cy="123826"/>
+            <a:off x="1440000" y="604800"/>
+            <a:ext cx="1296000" cy="133351"/>
           </a:xfrm>
           <a:prstGeom prst="rect">
             <a:avLst/>
@@ -3571,18 +4432,201 @@
           <a:p>
             <a:pPr algn="l">
               <a:lnSpc>
-                <a:spcPts val="942"/>
+                <a:spcPts val="1015"/>
               </a:lnSpc>
             </a:pPr>
             <a:r>
-              <a:rPr sz="650" b="1" spc="200">
+              <a:rPr sz="700" b="0">
+                <a:solidFill>
+                  <a:srgbClr val="FFFFFF"/>
+                </a:solidFill>
+                <a:latin typeface="맑은 고딕"/>
+                <a:ea typeface="맑은 고딕"/>
+              </a:rPr>
+              <a:t>두피 케어</a:t>
+            </a:r>
+          </a:p>
+        </p:txBody>
+      </p:sp>
+      <p:cxnSp>
+        <p:nvCxnSpPr>
+          <p:cNvPr id="41" name="Connector 40"/>
+          <p:cNvCxnSpPr/>
+          <p:nvPr/>
+        </p:nvCxnSpPr>
+        <p:spPr>
+          <a:xfrm>
+            <a:off x="1440000" y="763200"/>
+            <a:ext cx="1548000" cy="0"/>
+          </a:xfrm>
+          <a:prstGeom prst="line">
+            <a:avLst/>
+          </a:prstGeom>
+          <a:ln w="3600">
+            <a:solidFill>
+              <a:srgbClr val="2A2F38"/>
+            </a:solidFill>
+          </a:ln>
+        </p:spPr>
+      </p:cxnSp>
+      <p:sp>
+        <p:nvSpPr>
+          <p:cNvPr id="42" name="텍스트"/>
+          <p:cNvSpPr txBox="1"/>
+          <p:nvPr/>
+        </p:nvSpPr>
+        <p:spPr>
+          <a:xfrm>
+            <a:off x="1440000" y="806400"/>
+            <a:ext cx="1296000" cy="133351"/>
+          </a:xfrm>
+          <a:prstGeom prst="rect">
+            <a:avLst/>
+          </a:prstGeom>
+          <a:noFill/>
+        </p:spPr>
+        <p:txBody>
+          <a:bodyPr wrap="square" lIns="0" rIns="0" tIns="0" bIns="0" anchor="t">
+            <a:spAutoFit/>
+          </a:bodyPr>
+          <a:lstStyle/>
+          <a:p>
+            <a:pPr algn="l">
+              <a:lnSpc>
+                <a:spcPts val="1015"/>
+              </a:lnSpc>
+            </a:pPr>
+            <a:r>
+              <a:rPr sz="700" b="0">
+                <a:solidFill>
+                  <a:srgbClr val="FFFFFF"/>
+                </a:solidFill>
+                <a:latin typeface="맑은 고딕"/>
+                <a:ea typeface="맑은 고딕"/>
+              </a:rPr>
+              <a:t>남성 컷</a:t>
+            </a:r>
+          </a:p>
+        </p:txBody>
+      </p:sp>
+      <p:cxnSp>
+        <p:nvCxnSpPr>
+          <p:cNvPr id="43" name="Connector 42"/>
+          <p:cNvCxnSpPr/>
+          <p:nvPr/>
+        </p:nvCxnSpPr>
+        <p:spPr>
+          <a:xfrm>
+            <a:off x="1440000" y="964800"/>
+            <a:ext cx="1548000" cy="0"/>
+          </a:xfrm>
+          <a:prstGeom prst="line">
+            <a:avLst/>
+          </a:prstGeom>
+          <a:ln w="3600">
+            <a:solidFill>
+              <a:srgbClr val="2A2F38"/>
+            </a:solidFill>
+          </a:ln>
+        </p:spPr>
+      </p:cxnSp>
+      <p:sp>
+        <p:nvSpPr>
+          <p:cNvPr id="44" name="텍스트"/>
+          <p:cNvSpPr txBox="1"/>
+          <p:nvPr/>
+        </p:nvSpPr>
+        <p:spPr>
+          <a:xfrm>
+            <a:off x="1440000" y="1008000"/>
+            <a:ext cx="1296000" cy="133351"/>
+          </a:xfrm>
+          <a:prstGeom prst="rect">
+            <a:avLst/>
+          </a:prstGeom>
+          <a:noFill/>
+        </p:spPr>
+        <p:txBody>
+          <a:bodyPr wrap="square" lIns="0" rIns="0" tIns="0" bIns="0" anchor="t">
+            <a:spAutoFit/>
+          </a:bodyPr>
+          <a:lstStyle/>
+          <a:p>
+            <a:pPr algn="l">
+              <a:lnSpc>
+                <a:spcPts val="1015"/>
+              </a:lnSpc>
+            </a:pPr>
+            <a:r>
+              <a:rPr sz="700" b="0">
+                <a:solidFill>
+                  <a:srgbClr val="FFFFFF"/>
+                </a:solidFill>
+                <a:latin typeface="맑은 고딕"/>
+                <a:ea typeface="맑은 고딕"/>
+              </a:rPr>
+              <a:t>예약제 운영</a:t>
+            </a:r>
+          </a:p>
+        </p:txBody>
+      </p:sp>
+      <p:cxnSp>
+        <p:nvCxnSpPr>
+          <p:cNvPr id="45" name="Connector 44"/>
+          <p:cNvCxnSpPr/>
+          <p:nvPr/>
+        </p:nvCxnSpPr>
+        <p:spPr>
+          <a:xfrm>
+            <a:off x="1440000" y="1166400"/>
+            <a:ext cx="1548000" cy="0"/>
+          </a:xfrm>
+          <a:prstGeom prst="line">
+            <a:avLst/>
+          </a:prstGeom>
+          <a:ln w="3600">
+            <a:solidFill>
+              <a:srgbClr val="2A2F38"/>
+            </a:solidFill>
+          </a:ln>
+        </p:spPr>
+      </p:cxnSp>
+      <p:sp>
+        <p:nvSpPr>
+          <p:cNvPr id="46" name="텍스트"/>
+          <p:cNvSpPr txBox="1"/>
+          <p:nvPr/>
+        </p:nvSpPr>
+        <p:spPr>
+          <a:xfrm>
+            <a:off x="1440000" y="1569600"/>
+            <a:ext cx="1548000" cy="114301"/>
+          </a:xfrm>
+          <a:prstGeom prst="rect">
+            <a:avLst/>
+          </a:prstGeom>
+          <a:noFill/>
+        </p:spPr>
+        <p:txBody>
+          <a:bodyPr wrap="square" lIns="0" rIns="0" tIns="0" bIns="0" anchor="t">
+            <a:spAutoFit/>
+          </a:bodyPr>
+          <a:lstStyle/>
+          <a:p>
+            <a:pPr algn="l">
+              <a:lnSpc>
+                <a:spcPts val="869"/>
+              </a:lnSpc>
+            </a:pPr>
+            <a:r>
+              <a:rPr sz="600" b="0">
                 <a:solidFill>
                   <a:srgbClr val="A3A9B5"/>
                 </a:solidFill>
                 <a:latin typeface="맑은 고딕"/>
                 <a:ea typeface="맑은 고딕"/>
               </a:rPr>
-              <a:t>샵 이름</a:t>
+              <a:t>평일 10:00 – 21:00   |   blog.example.com</a:t>
             </a:r>
           </a:p>
         </p:txBody>
